--- a/instructor/slides/pptx/lectures/S14-C-iam-gst-claims.pptx
+++ b/instructor/slides/pptx/lectures/S14-C-iam-gst-claims.pptx
@@ -3669,8 +3669,8 @@
         </p:nvSpPr>
         <p:spPr>
           <a:xfrm>
-            <a:off x="640080" y="1920240"/>
-            <a:ext cx="10972800" cy="1463040"/>
+            <a:off x="640080" y="1828800"/>
+            <a:ext cx="6675120" cy="1645920"/>
           </a:xfrm>
           <a:prstGeom prst="rect">
             <a:avLst/>
@@ -3684,7 +3684,7 @@
           <a:lstStyle/>
           <a:p>
             <a:r>
-              <a:rPr sz="4400" b="1">
+              <a:rPr sz="4000" b="1">
                 <a:solidFill>
                   <a:srgbClr val="FFFFFF"/>
                 </a:solidFill>
@@ -3703,8 +3703,8 @@
         </p:nvSpPr>
         <p:spPr>
           <a:xfrm>
-            <a:off x="640080" y="3657600"/>
-            <a:ext cx="10789920" cy="1097280"/>
+            <a:off x="640080" y="3794760"/>
+            <a:ext cx="6675120" cy="1097280"/>
           </a:xfrm>
           <a:prstGeom prst="rect">
             <a:avLst/>
@@ -3718,7 +3718,7 @@
           <a:lstStyle/>
           <a:p>
             <a:r>
-              <a:rPr sz="2000" b="0">
+              <a:rPr sz="1800" b="0">
                 <a:solidFill>
                   <a:srgbClr val="B7CBDE"/>
                 </a:solidFill>
@@ -3737,8 +3737,8 @@
         </p:nvSpPr>
         <p:spPr>
           <a:xfrm>
-            <a:off x="640080" y="5029200"/>
-            <a:ext cx="10972800" cy="457200"/>
+            <a:off x="640080" y="5120640"/>
+            <a:ext cx="6766560" cy="457200"/>
           </a:xfrm>
           <a:prstGeom prst="rect">
             <a:avLst/>
@@ -3752,7 +3752,7 @@
           <a:lstStyle/>
           <a:p>
             <a:r>
-              <a:rPr sz="1600" b="0">
+              <a:rPr sz="1500" b="0">
                 <a:solidFill>
                   <a:srgbClr val="3EC6FF"/>
                 </a:solidFill>
@@ -3763,6 +3763,30 @@
           </a:p>
         </p:txBody>
       </p:sp>
+      <p:pic>
+        <p:nvPicPr>
+          <p:cNvPr id="7" name="Picture 6" descr="dw-mapping.jpg"/>
+          <p:cNvPicPr>
+            <a:picLocks noChangeAspect="1"/>
+          </p:cNvPicPr>
+          <p:nvPr/>
+        </p:nvPicPr>
+        <p:blipFill>
+          <a:blip r:embed="rId2"/>
+          <a:stretch>
+            <a:fillRect/>
+          </a:stretch>
+        </p:blipFill>
+        <p:spPr>
+          <a:xfrm>
+            <a:off x="7452360" y="1325880"/>
+            <a:ext cx="4160520" cy="4160520"/>
+          </a:xfrm>
+          <a:prstGeom prst="rect">
+            <a:avLst/>
+          </a:prstGeom>
+        </p:spPr>
+      </p:pic>
     </p:spTree>
   </p:cSld>
   <p:clrMapOvr>
@@ -3866,8 +3890,8 @@
         </p:nvSpPr>
         <p:spPr>
           <a:xfrm>
-            <a:off x="640080" y="685800"/>
-            <a:ext cx="10972800" cy="1463040"/>
+            <a:off x="640080" y="658368"/>
+            <a:ext cx="7863840" cy="1645920"/>
           </a:xfrm>
           <a:prstGeom prst="rect">
             <a:avLst/>
@@ -3881,7 +3905,7 @@
           <a:lstStyle/>
           <a:p>
             <a:r>
-              <a:rPr sz="3200" b="1">
+              <a:rPr sz="3000" b="1">
                 <a:solidFill>
                   <a:srgbClr val="FFFFFF"/>
                 </a:solidFill>
@@ -3900,8 +3924,8 @@
         </p:nvSpPr>
         <p:spPr>
           <a:xfrm>
-            <a:off x="777240" y="2286000"/>
-            <a:ext cx="10607040" cy="4754880"/>
+            <a:off x="777240" y="2331720"/>
+            <a:ext cx="7498079" cy="4754880"/>
           </a:xfrm>
           <a:prstGeom prst="rect">
             <a:avLst/>
@@ -3920,7 +3944,7 @@
               </a:spcAft>
             </a:pPr>
             <a:r>
-              <a:rPr sz="2400" b="0">
+              <a:rPr sz="2200" b="0">
                 <a:solidFill>
                   <a:srgbClr val="FFFFFF"/>
                 </a:solidFill>
@@ -3936,7 +3960,7 @@
               </a:spcAft>
             </a:pPr>
             <a:r>
-              <a:rPr sz="2400" b="0">
+              <a:rPr sz="2200" b="0">
                 <a:solidFill>
                   <a:srgbClr val="FFFFFF"/>
                 </a:solidFill>
@@ -3952,7 +3976,7 @@
               </a:spcAft>
             </a:pPr>
             <a:r>
-              <a:rPr sz="2400" b="0">
+              <a:rPr sz="2200" b="0">
                 <a:solidFill>
                   <a:srgbClr val="FFFFFF"/>
                 </a:solidFill>
@@ -3963,6 +3987,30 @@
           </a:p>
         </p:txBody>
       </p:sp>
+      <p:pic>
+        <p:nvPicPr>
+          <p:cNvPr id="6" name="Picture 5" descr="dw-mapping.jpg"/>
+          <p:cNvPicPr>
+            <a:picLocks noChangeAspect="1"/>
+          </p:cNvPicPr>
+          <p:nvPr/>
+        </p:nvPicPr>
+        <p:blipFill>
+          <a:blip r:embed="rId2"/>
+          <a:stretch>
+            <a:fillRect/>
+          </a:stretch>
+        </p:blipFill>
+        <p:spPr>
+          <a:xfrm>
+            <a:off x="8732520" y="2057400"/>
+            <a:ext cx="2880360" cy="2880360"/>
+          </a:xfrm>
+          <a:prstGeom prst="rect">
+            <a:avLst/>
+          </a:prstGeom>
+        </p:spPr>
+      </p:pic>
     </p:spTree>
   </p:cSld>
   <p:clrMapOvr>
@@ -4066,8 +4114,8 @@
         </p:nvSpPr>
         <p:spPr>
           <a:xfrm>
-            <a:off x="640080" y="685800"/>
-            <a:ext cx="10972800" cy="1463040"/>
+            <a:off x="640080" y="658368"/>
+            <a:ext cx="7863840" cy="1645920"/>
           </a:xfrm>
           <a:prstGeom prst="rect">
             <a:avLst/>
@@ -4081,7 +4129,7 @@
           <a:lstStyle/>
           <a:p>
             <a:r>
-              <a:rPr sz="3200" b="1">
+              <a:rPr sz="3000" b="1">
                 <a:solidFill>
                   <a:srgbClr val="FFFFFF"/>
                 </a:solidFill>
@@ -4100,8 +4148,8 @@
         </p:nvSpPr>
         <p:spPr>
           <a:xfrm>
-            <a:off x="777240" y="2286000"/>
-            <a:ext cx="10607040" cy="4754880"/>
+            <a:off x="777240" y="2331720"/>
+            <a:ext cx="7498079" cy="4754880"/>
           </a:xfrm>
           <a:prstGeom prst="rect">
             <a:avLst/>
@@ -4120,7 +4168,7 @@
               </a:spcAft>
             </a:pPr>
             <a:r>
-              <a:rPr sz="2400" b="0">
+              <a:rPr sz="2200" b="0">
                 <a:solidFill>
                   <a:srgbClr val="FFFFFF"/>
                 </a:solidFill>
@@ -4136,7 +4184,7 @@
               </a:spcAft>
             </a:pPr>
             <a:r>
-              <a:rPr sz="2400" b="0">
+              <a:rPr sz="2200" b="0">
                 <a:solidFill>
                   <a:srgbClr val="FFFFFF"/>
                 </a:solidFill>
@@ -4152,7 +4200,7 @@
               </a:spcAft>
             </a:pPr>
             <a:r>
-              <a:rPr sz="2400" b="0">
+              <a:rPr sz="2200" b="0">
                 <a:solidFill>
                   <a:srgbClr val="FFFFFF"/>
                 </a:solidFill>
@@ -4168,7 +4216,7 @@
               </a:spcAft>
             </a:pPr>
             <a:r>
-              <a:rPr sz="2400" b="0">
+              <a:rPr sz="2200" b="0">
                 <a:solidFill>
                   <a:srgbClr val="FFFFFF"/>
                 </a:solidFill>
@@ -4179,6 +4227,30 @@
           </a:p>
         </p:txBody>
       </p:sp>
+      <p:pic>
+        <p:nvPicPr>
+          <p:cNvPr id="6" name="Picture 5" descr="dw-mapping.jpg"/>
+          <p:cNvPicPr>
+            <a:picLocks noChangeAspect="1"/>
+          </p:cNvPicPr>
+          <p:nvPr/>
+        </p:nvPicPr>
+        <p:blipFill>
+          <a:blip r:embed="rId2"/>
+          <a:stretch>
+            <a:fillRect/>
+          </a:stretch>
+        </p:blipFill>
+        <p:spPr>
+          <a:xfrm>
+            <a:off x="8732520" y="2057400"/>
+            <a:ext cx="2880360" cy="2880360"/>
+          </a:xfrm>
+          <a:prstGeom prst="rect">
+            <a:avLst/>
+          </a:prstGeom>
+        </p:spPr>
+      </p:pic>
     </p:spTree>
   </p:cSld>
   <p:clrMapOvr>
@@ -4282,8 +4354,8 @@
         </p:nvSpPr>
         <p:spPr>
           <a:xfrm>
-            <a:off x="640080" y="685800"/>
-            <a:ext cx="10972800" cy="1463040"/>
+            <a:off x="640080" y="658368"/>
+            <a:ext cx="7863840" cy="1645920"/>
           </a:xfrm>
           <a:prstGeom prst="rect">
             <a:avLst/>
@@ -4297,7 +4369,7 @@
           <a:lstStyle/>
           <a:p>
             <a:r>
-              <a:rPr sz="3200" b="1">
+              <a:rPr sz="3000" b="1">
                 <a:solidFill>
                   <a:srgbClr val="FFFFFF"/>
                 </a:solidFill>
@@ -4316,8 +4388,8 @@
         </p:nvSpPr>
         <p:spPr>
           <a:xfrm>
-            <a:off x="777240" y="2286000"/>
-            <a:ext cx="10607040" cy="4754880"/>
+            <a:off x="777240" y="2331720"/>
+            <a:ext cx="7498079" cy="4754880"/>
           </a:xfrm>
           <a:prstGeom prst="rect">
             <a:avLst/>
@@ -4336,7 +4408,7 @@
               </a:spcAft>
             </a:pPr>
             <a:r>
-              <a:rPr sz="2400" b="0">
+              <a:rPr sz="2200" b="0">
                 <a:solidFill>
                   <a:srgbClr val="FFFFFF"/>
                 </a:solidFill>
@@ -4352,7 +4424,7 @@
               </a:spcAft>
             </a:pPr>
             <a:r>
-              <a:rPr sz="2400" b="0">
+              <a:rPr sz="2200" b="0">
                 <a:solidFill>
                   <a:srgbClr val="FFFFFF"/>
                 </a:solidFill>
@@ -4368,7 +4440,7 @@
               </a:spcAft>
             </a:pPr>
             <a:r>
-              <a:rPr sz="2400" b="0">
+              <a:rPr sz="2200" b="0">
                 <a:solidFill>
                   <a:srgbClr val="FFFFFF"/>
                 </a:solidFill>
@@ -4384,7 +4456,7 @@
               </a:spcAft>
             </a:pPr>
             <a:r>
-              <a:rPr sz="2400" b="0">
+              <a:rPr sz="2200" b="0">
                 <a:solidFill>
                   <a:srgbClr val="FFFFFF"/>
                 </a:solidFill>
@@ -4395,6 +4467,30 @@
           </a:p>
         </p:txBody>
       </p:sp>
+      <p:pic>
+        <p:nvPicPr>
+          <p:cNvPr id="6" name="Picture 5" descr="dw-mapping.jpg"/>
+          <p:cNvPicPr>
+            <a:picLocks noChangeAspect="1"/>
+          </p:cNvPicPr>
+          <p:nvPr/>
+        </p:nvPicPr>
+        <p:blipFill>
+          <a:blip r:embed="rId2"/>
+          <a:stretch>
+            <a:fillRect/>
+          </a:stretch>
+        </p:blipFill>
+        <p:spPr>
+          <a:xfrm>
+            <a:off x="8732520" y="2057400"/>
+            <a:ext cx="2880360" cy="2880360"/>
+          </a:xfrm>
+          <a:prstGeom prst="rect">
+            <a:avLst/>
+          </a:prstGeom>
+        </p:spPr>
+      </p:pic>
     </p:spTree>
   </p:cSld>
   <p:clrMapOvr>
@@ -4498,8 +4594,8 @@
         </p:nvSpPr>
         <p:spPr>
           <a:xfrm>
-            <a:off x="640080" y="685800"/>
-            <a:ext cx="10972800" cy="1463040"/>
+            <a:off x="640080" y="658368"/>
+            <a:ext cx="7863840" cy="1645920"/>
           </a:xfrm>
           <a:prstGeom prst="rect">
             <a:avLst/>
@@ -4513,7 +4609,7 @@
           <a:lstStyle/>
           <a:p>
             <a:r>
-              <a:rPr sz="3200" b="1">
+              <a:rPr sz="3000" b="1">
                 <a:solidFill>
                   <a:srgbClr val="FFFFFF"/>
                 </a:solidFill>
@@ -4532,8 +4628,8 @@
         </p:nvSpPr>
         <p:spPr>
           <a:xfrm>
-            <a:off x="777240" y="2286000"/>
-            <a:ext cx="10607040" cy="4754880"/>
+            <a:off x="777240" y="2331720"/>
+            <a:ext cx="7498079" cy="4754880"/>
           </a:xfrm>
           <a:prstGeom prst="rect">
             <a:avLst/>
@@ -4552,7 +4648,7 @@
               </a:spcAft>
             </a:pPr>
             <a:r>
-              <a:rPr sz="2400" b="0">
+              <a:rPr sz="2200" b="0">
                 <a:solidFill>
                   <a:srgbClr val="FFFFFF"/>
                 </a:solidFill>
@@ -4568,7 +4664,7 @@
               </a:spcAft>
             </a:pPr>
             <a:r>
-              <a:rPr sz="2400" b="0">
+              <a:rPr sz="2200" b="0">
                 <a:solidFill>
                   <a:srgbClr val="FFFFFF"/>
                 </a:solidFill>
@@ -4579,6 +4675,30 @@
           </a:p>
         </p:txBody>
       </p:sp>
+      <p:pic>
+        <p:nvPicPr>
+          <p:cNvPr id="6" name="Picture 5" descr="dw-mapping.jpg"/>
+          <p:cNvPicPr>
+            <a:picLocks noChangeAspect="1"/>
+          </p:cNvPicPr>
+          <p:nvPr/>
+        </p:nvPicPr>
+        <p:blipFill>
+          <a:blip r:embed="rId2"/>
+          <a:stretch>
+            <a:fillRect/>
+          </a:stretch>
+        </p:blipFill>
+        <p:spPr>
+          <a:xfrm>
+            <a:off x="8732520" y="2057400"/>
+            <a:ext cx="2880360" cy="2880360"/>
+          </a:xfrm>
+          <a:prstGeom prst="rect">
+            <a:avLst/>
+          </a:prstGeom>
+        </p:spPr>
+      </p:pic>
     </p:spTree>
   </p:cSld>
   <p:clrMapOvr>
@@ -4682,8 +4802,8 @@
         </p:nvSpPr>
         <p:spPr>
           <a:xfrm>
-            <a:off x="640080" y="685800"/>
-            <a:ext cx="10972800" cy="1463040"/>
+            <a:off x="640080" y="658368"/>
+            <a:ext cx="7863840" cy="1645920"/>
           </a:xfrm>
           <a:prstGeom prst="rect">
             <a:avLst/>
@@ -4697,7 +4817,7 @@
           <a:lstStyle/>
           <a:p>
             <a:r>
-              <a:rPr sz="3200" b="1">
+              <a:rPr sz="3000" b="1">
                 <a:solidFill>
                   <a:srgbClr val="FFFFFF"/>
                 </a:solidFill>
@@ -4716,8 +4836,8 @@
         </p:nvSpPr>
         <p:spPr>
           <a:xfrm>
-            <a:off x="777240" y="2286000"/>
-            <a:ext cx="10607040" cy="4754880"/>
+            <a:off x="777240" y="2331720"/>
+            <a:ext cx="7498079" cy="4754880"/>
           </a:xfrm>
           <a:prstGeom prst="rect">
             <a:avLst/>
@@ -4736,7 +4856,7 @@
               </a:spcAft>
             </a:pPr>
             <a:r>
-              <a:rPr sz="2400" b="0">
+              <a:rPr sz="2200" b="0">
                 <a:solidFill>
                   <a:srgbClr val="FFB020"/>
                 </a:solidFill>
@@ -4752,7 +4872,7 @@
               </a:spcAft>
             </a:pPr>
             <a:r>
-              <a:rPr sz="2400" b="0">
+              <a:rPr sz="2200" b="0">
                 <a:solidFill>
                   <a:srgbClr val="FFB020"/>
                 </a:solidFill>
@@ -4768,7 +4888,7 @@
               </a:spcAft>
             </a:pPr>
             <a:r>
-              <a:rPr sz="2400" b="0">
+              <a:rPr sz="2200" b="0">
                 <a:solidFill>
                   <a:srgbClr val="FFB020"/>
                 </a:solidFill>
@@ -4784,7 +4904,7 @@
               </a:spcAft>
             </a:pPr>
             <a:r>
-              <a:rPr sz="2400" b="0">
+              <a:rPr sz="2200" b="0">
                 <a:solidFill>
                   <a:srgbClr val="FFB020"/>
                 </a:solidFill>
@@ -4795,6 +4915,30 @@
           </a:p>
         </p:txBody>
       </p:sp>
+      <p:pic>
+        <p:nvPicPr>
+          <p:cNvPr id="6" name="Picture 5" descr="dw-pause.jpg"/>
+          <p:cNvPicPr>
+            <a:picLocks noChangeAspect="1"/>
+          </p:cNvPicPr>
+          <p:nvPr/>
+        </p:nvPicPr>
+        <p:blipFill>
+          <a:blip r:embed="rId2"/>
+          <a:stretch>
+            <a:fillRect/>
+          </a:stretch>
+        </p:blipFill>
+        <p:spPr>
+          <a:xfrm>
+            <a:off x="8366760" y="1874519"/>
+            <a:ext cx="3246120" cy="3246120"/>
+          </a:xfrm>
+          <a:prstGeom prst="rect">
+            <a:avLst/>
+          </a:prstGeom>
+        </p:spPr>
+      </p:pic>
     </p:spTree>
   </p:cSld>
   <p:clrMapOvr>
@@ -4898,8 +5042,8 @@
         </p:nvSpPr>
         <p:spPr>
           <a:xfrm>
-            <a:off x="640080" y="685800"/>
-            <a:ext cx="10972800" cy="1463040"/>
+            <a:off x="640080" y="658368"/>
+            <a:ext cx="7863840" cy="1645920"/>
           </a:xfrm>
           <a:prstGeom prst="rect">
             <a:avLst/>
@@ -4913,7 +5057,7 @@
           <a:lstStyle/>
           <a:p>
             <a:r>
-              <a:rPr sz="3200" b="1">
+              <a:rPr sz="3000" b="1">
                 <a:solidFill>
                   <a:srgbClr val="FFFFFF"/>
                 </a:solidFill>
@@ -4932,8 +5076,8 @@
         </p:nvSpPr>
         <p:spPr>
           <a:xfrm>
-            <a:off x="777240" y="2286000"/>
-            <a:ext cx="10607040" cy="4754880"/>
+            <a:off x="777240" y="2331720"/>
+            <a:ext cx="7498079" cy="4754880"/>
           </a:xfrm>
           <a:prstGeom prst="rect">
             <a:avLst/>
@@ -4952,7 +5096,7 @@
               </a:spcAft>
             </a:pPr>
             <a:r>
-              <a:rPr sz="2400" b="0">
+              <a:rPr sz="2200" b="0">
                 <a:solidFill>
                   <a:srgbClr val="FFFFFF"/>
                 </a:solidFill>
@@ -4968,7 +5112,7 @@
               </a:spcAft>
             </a:pPr>
             <a:r>
-              <a:rPr sz="2400" b="0">
+              <a:rPr sz="2200" b="0">
                 <a:solidFill>
                   <a:srgbClr val="FFFFFF"/>
                 </a:solidFill>
@@ -4979,6 +5123,30 @@
           </a:p>
         </p:txBody>
       </p:sp>
+      <p:pic>
+        <p:nvPicPr>
+          <p:cNvPr id="6" name="Picture 5" descr="dw-mapping.jpg"/>
+          <p:cNvPicPr>
+            <a:picLocks noChangeAspect="1"/>
+          </p:cNvPicPr>
+          <p:nvPr/>
+        </p:nvPicPr>
+        <p:blipFill>
+          <a:blip r:embed="rId2"/>
+          <a:stretch>
+            <a:fillRect/>
+          </a:stretch>
+        </p:blipFill>
+        <p:spPr>
+          <a:xfrm>
+            <a:off x="8732520" y="2057400"/>
+            <a:ext cx="2880360" cy="2880360"/>
+          </a:xfrm>
+          <a:prstGeom prst="rect">
+            <a:avLst/>
+          </a:prstGeom>
+        </p:spPr>
+      </p:pic>
     </p:spTree>
   </p:cSld>
   <p:clrMapOvr>
